--- a/experiment/Immune_System_Presentation.pptx
+++ b/experiment/Immune_System_Presentation.pptx
@@ -17,7 +17,6 @@
     <p:sldId id="265" r:id="rId16"/>
     <p:sldId id="266" r:id="rId17"/>
     <p:sldId id="267" r:id="rId18"/>
-    <p:sldId id="268" r:id="rId19"/>
   </p:sldIdLst>
   <p:sldSz cx="12191695" cy="6858000" type="screen4x3"/>
   <p:notesSz cx="6858000" cy="9144000"/>
@@ -3299,7 +3298,7 @@
         <p:spPr>
           <a:xfrm>
             <a:off x="685800" y="1645920"/>
-            <a:ext cx="5486400" cy="4114800"/>
+            <a:ext cx="5029200" cy="4114800"/>
           </a:xfrm>
           <a:prstGeom prst="rect">
             <a:avLst/>
@@ -3324,7 +3323,7 @@
               </a:defRPr>
             </a:pPr>
             <a:r>
-              <a:t>• Recognition: Immune cells identify and recognize foreign pathogens</a:t>
+              <a:t>• Recognition: Antigen detection by immune cells</a:t>
             </a:r>
           </a:p>
           <a:p>
@@ -3340,7 +3339,7 @@
               </a:defRPr>
             </a:pPr>
             <a:r>
-              <a:t>• Activation: T cells and B cells become active and multiply rapidly</a:t>
+              <a:t>• Activation: Cytokine signaling and immune cell proliferation</a:t>
             </a:r>
           </a:p>
           <a:p>
@@ -3356,7 +3355,7 @@
               </a:defRPr>
             </a:pPr>
             <a:r>
-              <a:t>• Attack: Antibodies neutralize pathogens; T cells destroy infected cells</a:t>
+              <a:t>• Attack: Pathogen elimination through multiple mechanisms</a:t>
             </a:r>
           </a:p>
           <a:p>
@@ -3372,82 +3371,35 @@
               </a:defRPr>
             </a:pPr>
             <a:r>
-              <a:t>• Resolution: Immune response winds down; memory cells remain for future threats</a:t>
-            </a:r>
-          </a:p>
-        </p:txBody>
-      </p:sp>
-      <p:sp>
-        <p:nvSpPr>
-          <p:cNvPr id="5" name="Rounded Rectangle 4"/>
-          <p:cNvSpPr/>
+              <a:t>• Resolution: Inflammation reduction and tissue repair</a:t>
+            </a:r>
+          </a:p>
+        </p:txBody>
+      </p:sp>
+      <p:pic>
+        <p:nvPicPr>
+          <p:cNvPr id="5" name="Picture 4" descr="slide10_immune_response.png"/>
+          <p:cNvPicPr>
+            <a:picLocks noChangeAspect="1"/>
+          </p:cNvPicPr>
           <p:nvPr/>
-        </p:nvSpPr>
-        <p:spPr>
-          <a:xfrm>
-            <a:off x="6858000" y="1645920"/>
-            <a:ext cx="4647895" cy="4114800"/>
-          </a:xfrm>
-          <a:prstGeom prst="roundRect">
+        </p:nvPicPr>
+        <p:blipFill>
+          <a:blip r:embed="rId2"/>
+          <a:stretch>
+            <a:fillRect/>
+          </a:stretch>
+        </p:blipFill>
+        <p:spPr>
+          <a:xfrm>
+            <a:off x="6172200" y="1645920"/>
+            <a:ext cx="5333695" cy="3474720"/>
+          </a:xfrm>
+          <a:prstGeom prst="rect">
             <a:avLst/>
           </a:prstGeom>
-          <a:solidFill>
-            <a:srgbClr val="161E31"/>
-          </a:solidFill>
-          <a:ln w="19050">
-            <a:solidFill>
-              <a:srgbClr val="283757"/>
-            </a:solidFill>
-          </a:ln>
-        </p:spPr>
-        <p:style>
-          <a:lnRef idx="1">
-            <a:schemeClr val="accent1"/>
-          </a:lnRef>
-          <a:fillRef idx="3">
-            <a:schemeClr val="accent1"/>
-          </a:fillRef>
-          <a:effectRef idx="2">
-            <a:schemeClr val="accent1"/>
-          </a:effectRef>
-          <a:fontRef idx="minor">
-            <a:schemeClr val="lt1"/>
-          </a:fontRef>
-        </p:style>
-        <p:txBody>
-          <a:bodyPr rtlCol="0" anchor="ctr" wrap="square" lIns="182880" rIns="182880" tIns="182880" bIns="182880"/>
-          <a:lstStyle/>
-          <a:p>
-            <a:pPr algn="ctr">
-              <a:spcAft>
-                <a:spcPts val="1000"/>
-              </a:spcAft>
-              <a:defRPr sz="1400" b="1">
-                <a:solidFill>
-                  <a:srgbClr val="8A2BE2"/>
-                </a:solidFill>
-                <a:latin typeface="Arial"/>
-              </a:defRPr>
-            </a:pPr>
-            <a:r>
-              <a:t>Key Insight:</a:t>
-            </a:r>
-          </a:p>
-          <a:p>
-            <a:pPr>
-              <a:defRPr sz="1100">
-                <a:solidFill>
-                  <a:srgbClr val="94A3B8"/>
-                </a:solidFill>
-                <a:latin typeface="Arial"/>
-              </a:defRPr>
-            </a:pPr>
-            <a:r>
-              <a:t>This slide covers 'The Immune Response Process' in context of The Human Immune System: How Our Body Fights Diseases. Focus on discussing design boundaries and parameters during lecture.</a:t>
-            </a:r>
-          </a:p>
-        </p:txBody>
-      </p:sp>
+        </p:spPr>
+      </p:pic>
     </p:spTree>
   </p:cSld>
   <p:clrMapOvr>
@@ -3505,7 +3457,7 @@
               </a:defRPr>
             </a:pPr>
             <a:r>
-              <a:t>IMMUNITY CHALLENGES</a:t>
+              <a:t>HEALTH MAINTENANCE</a:t>
             </a:r>
           </a:p>
         </p:txBody>
@@ -3541,7 +3493,7 @@
               </a:defRPr>
             </a:pPr>
             <a:r>
-              <a:t>Challenges to Immune Function</a:t>
+              <a:t>Maintaining Optimal Immune Health</a:t>
             </a:r>
           </a:p>
         </p:txBody>
@@ -3555,7 +3507,7 @@
         <p:spPr>
           <a:xfrm>
             <a:off x="685800" y="1645920"/>
-            <a:ext cx="5486400" cy="4114800"/>
+            <a:ext cx="5029200" cy="4114800"/>
           </a:xfrm>
           <a:prstGeom prst="rect">
             <a:avLst/>
@@ -3580,7 +3532,7 @@
               </a:defRPr>
             </a:pPr>
             <a:r>
-              <a:t>• Immunodeficiency: Weakened immune system from disease or medication</a:t>
+              <a:t>• Sleep: 7-9 hours daily for immune cell production and repair</a:t>
             </a:r>
           </a:p>
           <a:p>
@@ -3596,7 +3548,7 @@
               </a:defRPr>
             </a:pPr>
             <a:r>
-              <a:t>• Autoimmunity: Immune system mistakenly attacks body's own cells</a:t>
+              <a:t>• Nutrition: Vitamins C, D, zinc, and antioxidant-rich foods</a:t>
             </a:r>
           </a:p>
           <a:p>
@@ -3612,7 +3564,7 @@
               </a:defRPr>
             </a:pPr>
             <a:r>
-              <a:t>• Allergies: Overreaction to harmless substances</a:t>
+              <a:t>• Exercise: Regular physical activity enhances immune function</a:t>
             </a:r>
           </a:p>
           <a:p>
@@ -3628,82 +3580,35 @@
               </a:defRPr>
             </a:pPr>
             <a:r>
-              <a:t>• Pathogens Evolving: Viruses and bacteria mutate to evade immunity</a:t>
-            </a:r>
-          </a:p>
-        </p:txBody>
-      </p:sp>
-      <p:sp>
-        <p:nvSpPr>
-          <p:cNvPr id="5" name="Rounded Rectangle 4"/>
-          <p:cNvSpPr/>
+              <a:t>• Stress management: Chronic stress suppresses immune response</a:t>
+            </a:r>
+          </a:p>
+        </p:txBody>
+      </p:sp>
+      <p:pic>
+        <p:nvPicPr>
+          <p:cNvPr id="5" name="Picture 4" descr="slide11_immune_health.png"/>
+          <p:cNvPicPr>
+            <a:picLocks noChangeAspect="1"/>
+          </p:cNvPicPr>
           <p:nvPr/>
-        </p:nvSpPr>
-        <p:spPr>
-          <a:xfrm>
-            <a:off x="6858000" y="1645920"/>
-            <a:ext cx="4647895" cy="4114800"/>
-          </a:xfrm>
-          <a:prstGeom prst="roundRect">
+        </p:nvPicPr>
+        <p:blipFill>
+          <a:blip r:embed="rId2"/>
+          <a:stretch>
+            <a:fillRect/>
+          </a:stretch>
+        </p:blipFill>
+        <p:spPr>
+          <a:xfrm>
+            <a:off x="6172200" y="1645920"/>
+            <a:ext cx="5333695" cy="3474720"/>
+          </a:xfrm>
+          <a:prstGeom prst="rect">
             <a:avLst/>
           </a:prstGeom>
-          <a:solidFill>
-            <a:srgbClr val="161E31"/>
-          </a:solidFill>
-          <a:ln w="19050">
-            <a:solidFill>
-              <a:srgbClr val="283757"/>
-            </a:solidFill>
-          </a:ln>
-        </p:spPr>
-        <p:style>
-          <a:lnRef idx="1">
-            <a:schemeClr val="accent1"/>
-          </a:lnRef>
-          <a:fillRef idx="3">
-            <a:schemeClr val="accent1"/>
-          </a:fillRef>
-          <a:effectRef idx="2">
-            <a:schemeClr val="accent1"/>
-          </a:effectRef>
-          <a:fontRef idx="minor">
-            <a:schemeClr val="lt1"/>
-          </a:fontRef>
-        </p:style>
-        <p:txBody>
-          <a:bodyPr rtlCol="0" anchor="ctr" wrap="square" lIns="182880" rIns="182880" tIns="182880" bIns="182880"/>
-          <a:lstStyle/>
-          <a:p>
-            <a:pPr algn="ctr">
-              <a:spcAft>
-                <a:spcPts val="1000"/>
-              </a:spcAft>
-              <a:defRPr sz="1400" b="1">
-                <a:solidFill>
-                  <a:srgbClr val="8A2BE2"/>
-                </a:solidFill>
-                <a:latin typeface="Arial"/>
-              </a:defRPr>
-            </a:pPr>
-            <a:r>
-              <a:t>Key Insight:</a:t>
-            </a:r>
-          </a:p>
-          <a:p>
-            <a:pPr>
-              <a:defRPr sz="1100">
-                <a:solidFill>
-                  <a:srgbClr val="94A3B8"/>
-                </a:solidFill>
-                <a:latin typeface="Arial"/>
-              </a:defRPr>
-            </a:pPr>
-            <a:r>
-              <a:t>This slide covers 'Challenges to Immune Function' in context of The Human Immune System: How Our Body Fights Diseases. Focus on discussing design boundaries and parameters during lecture.</a:t>
-            </a:r>
-          </a:p>
-        </p:txBody>
-      </p:sp>
+        </p:spPr>
+      </p:pic>
     </p:spTree>
   </p:cSld>
   <p:clrMapOvr>
@@ -3713,262 +3618,6 @@
 </file>
 
 <file path=ppt/slides/slide12.xml><?xml version="1.0" encoding="utf-8"?>
-<p:sld xmlns:a="http://schemas.openxmlformats.org/drawingml/2006/main" xmlns:p="http://schemas.openxmlformats.org/presentationml/2006/main" xmlns:r="http://schemas.openxmlformats.org/officeDocument/2006/relationships">
-  <p:cSld>
-    <p:bg>
-      <p:bgPr>
-        <a:solidFill>
-          <a:srgbClr val="0B0F19"/>
-        </a:solidFill>
-        <a:effectLst/>
-      </p:bgPr>
-    </p:bg>
-    <p:spTree>
-      <p:nvGrpSpPr>
-        <p:cNvPr id="1" name=""/>
-        <p:cNvGrpSpPr/>
-        <p:nvPr/>
-      </p:nvGrpSpPr>
-      <p:grpSpPr/>
-      <p:sp>
-        <p:nvSpPr>
-          <p:cNvPr id="2" name="TextBox 1"/>
-          <p:cNvSpPr txBox="1"/>
-          <p:nvPr/>
-        </p:nvSpPr>
-        <p:spPr>
-          <a:xfrm>
-            <a:off x="685800" y="365760"/>
-            <a:ext cx="10820095" cy="274320"/>
-          </a:xfrm>
-          <a:prstGeom prst="rect">
-            <a:avLst/>
-          </a:prstGeom>
-          <a:noFill/>
-        </p:spPr>
-        <p:txBody>
-          <a:bodyPr wrap="square">
-            <a:spAutoFit/>
-          </a:bodyPr>
-          <a:lstStyle/>
-          <a:p>
-            <a:pPr>
-              <a:defRPr sz="1000" b="1">
-                <a:solidFill>
-                  <a:srgbClr val="00F2FE"/>
-                </a:solidFill>
-                <a:latin typeface="Arial"/>
-              </a:defRPr>
-            </a:pPr>
-            <a:r>
-              <a:t>CONCLUSION</a:t>
-            </a:r>
-          </a:p>
-        </p:txBody>
-      </p:sp>
-      <p:sp>
-        <p:nvSpPr>
-          <p:cNvPr id="3" name="TextBox 2"/>
-          <p:cNvSpPr txBox="1"/>
-          <p:nvPr/>
-        </p:nvSpPr>
-        <p:spPr>
-          <a:xfrm>
-            <a:off x="685800" y="640080"/>
-            <a:ext cx="10820095" cy="640080"/>
-          </a:xfrm>
-          <a:prstGeom prst="rect">
-            <a:avLst/>
-          </a:prstGeom>
-          <a:noFill/>
-        </p:spPr>
-        <p:txBody>
-          <a:bodyPr wrap="square">
-            <a:spAutoFit/>
-          </a:bodyPr>
-          <a:lstStyle/>
-          <a:p>
-            <a:pPr>
-              <a:defRPr sz="2600" b="1">
-                <a:solidFill>
-                  <a:srgbClr val="F8FAFC"/>
-                </a:solidFill>
-                <a:latin typeface="Arial"/>
-              </a:defRPr>
-            </a:pPr>
-            <a:r>
-              <a:t>Key Takeaways</a:t>
-            </a:r>
-          </a:p>
-        </p:txBody>
-      </p:sp>
-      <p:sp>
-        <p:nvSpPr>
-          <p:cNvPr id="4" name="TextBox 3"/>
-          <p:cNvSpPr txBox="1"/>
-          <p:nvPr/>
-        </p:nvSpPr>
-        <p:spPr>
-          <a:xfrm>
-            <a:off x="685800" y="1645920"/>
-            <a:ext cx="5486400" cy="4114800"/>
-          </a:xfrm>
-          <a:prstGeom prst="rect">
-            <a:avLst/>
-          </a:prstGeom>
-          <a:noFill/>
-        </p:spPr>
-        <p:txBody>
-          <a:bodyPr wrap="square">
-            <a:spAutoFit/>
-          </a:bodyPr>
-          <a:lstStyle/>
-          <a:p>
-            <a:pPr>
-              <a:spcBef>
-                <a:spcPts val="800"/>
-              </a:spcBef>
-              <a:defRPr sz="1300">
-                <a:solidFill>
-                  <a:srgbClr val="94A3B8"/>
-                </a:solidFill>
-                <a:latin typeface="Arial"/>
-              </a:defRPr>
-            </a:pPr>
-            <a:r>
-              <a:t>• The immune system is a sophisticated multi-layered defense network</a:t>
-            </a:r>
-          </a:p>
-          <a:p>
-            <a:pPr>
-              <a:spcBef>
-                <a:spcPts val="800"/>
-              </a:spcBef>
-              <a:defRPr sz="1300">
-                <a:solidFill>
-                  <a:srgbClr val="94A3B8"/>
-                </a:solidFill>
-                <a:latin typeface="Arial"/>
-              </a:defRPr>
-            </a:pPr>
-            <a:r>
-              <a:t>• Innate immunity provides rapid response; adaptive immunity provides targeted, long-term protection</a:t>
-            </a:r>
-          </a:p>
-          <a:p>
-            <a:pPr>
-              <a:spcBef>
-                <a:spcPts val="800"/>
-              </a:spcBef>
-              <a:defRPr sz="1300">
-                <a:solidFill>
-                  <a:srgbClr val="94A3B8"/>
-                </a:solidFill>
-                <a:latin typeface="Arial"/>
-              </a:defRPr>
-            </a:pPr>
-            <a:r>
-              <a:t>• Understanding immune function is crucial for health, vaccines, and disease prevention</a:t>
-            </a:r>
-          </a:p>
-          <a:p>
-            <a:pPr>
-              <a:spcBef>
-                <a:spcPts val="800"/>
-              </a:spcBef>
-              <a:defRPr sz="1300">
-                <a:solidFill>
-                  <a:srgbClr val="94A3B8"/>
-                </a:solidFill>
-                <a:latin typeface="Arial"/>
-              </a:defRPr>
-            </a:pPr>
-            <a:r>
-              <a:t>• Supporting immune health through proper nutrition, sleep, and exercise is essential</a:t>
-            </a:r>
-          </a:p>
-        </p:txBody>
-      </p:sp>
-      <p:sp>
-        <p:nvSpPr>
-          <p:cNvPr id="5" name="Rounded Rectangle 4"/>
-          <p:cNvSpPr/>
-          <p:nvPr/>
-        </p:nvSpPr>
-        <p:spPr>
-          <a:xfrm>
-            <a:off x="6858000" y="1645920"/>
-            <a:ext cx="4647895" cy="4114800"/>
-          </a:xfrm>
-          <a:prstGeom prst="roundRect">
-            <a:avLst/>
-          </a:prstGeom>
-          <a:solidFill>
-            <a:srgbClr val="161E31"/>
-          </a:solidFill>
-          <a:ln w="19050">
-            <a:solidFill>
-              <a:srgbClr val="283757"/>
-            </a:solidFill>
-          </a:ln>
-        </p:spPr>
-        <p:style>
-          <a:lnRef idx="1">
-            <a:schemeClr val="accent1"/>
-          </a:lnRef>
-          <a:fillRef idx="3">
-            <a:schemeClr val="accent1"/>
-          </a:fillRef>
-          <a:effectRef idx="2">
-            <a:schemeClr val="accent1"/>
-          </a:effectRef>
-          <a:fontRef idx="minor">
-            <a:schemeClr val="lt1"/>
-          </a:fontRef>
-        </p:style>
-        <p:txBody>
-          <a:bodyPr rtlCol="0" anchor="ctr" wrap="square" lIns="182880" rIns="182880" tIns="182880" bIns="182880"/>
-          <a:lstStyle/>
-          <a:p>
-            <a:pPr algn="ctr">
-              <a:spcAft>
-                <a:spcPts val="1000"/>
-              </a:spcAft>
-              <a:defRPr sz="1400" b="1">
-                <a:solidFill>
-                  <a:srgbClr val="8A2BE2"/>
-                </a:solidFill>
-                <a:latin typeface="Arial"/>
-              </a:defRPr>
-            </a:pPr>
-            <a:r>
-              <a:t>Key Insight:</a:t>
-            </a:r>
-          </a:p>
-          <a:p>
-            <a:pPr>
-              <a:defRPr sz="1100">
-                <a:solidFill>
-                  <a:srgbClr val="94A3B8"/>
-                </a:solidFill>
-                <a:latin typeface="Arial"/>
-              </a:defRPr>
-            </a:pPr>
-            <a:r>
-              <a:t>This slide covers 'Key Takeaways' in context of The Human Immune System: How Our Body Fights Diseases. Focus on discussing design boundaries and parameters during lecture.</a:t>
-            </a:r>
-          </a:p>
-        </p:txBody>
-      </p:sp>
-    </p:spTree>
-  </p:cSld>
-  <p:clrMapOvr>
-    <a:masterClrMapping/>
-  </p:clrMapOvr>
-</p:sld>
-</file>
-
-<file path=ppt/slides/slide13.xml><?xml version="1.0" encoding="utf-8"?>
 <p:sld xmlns:a="http://schemas.openxmlformats.org/drawingml/2006/main" xmlns:p="http://schemas.openxmlformats.org/presentationml/2006/main" xmlns:r="http://schemas.openxmlformats.org/officeDocument/2006/relationships">
   <p:cSld>
     <p:spTree>
@@ -4052,7 +3701,55 @@
               </a:defRPr>
             </a:pPr>
             <a:r>
-              <a:t>• Questions &amp; Discussion</a:t>
+              <a:t>• The immune system is a multi-layered defense protecting against pathogens</a:t>
+            </a:r>
+          </a:p>
+          <a:p>
+            <a:pPr>
+              <a:spcBef>
+                <a:spcPts val="800"/>
+              </a:spcBef>
+              <a:defRPr sz="1300">
+                <a:solidFill>
+                  <a:srgbClr val="94A3B8"/>
+                </a:solidFill>
+                <a:latin typeface="Arial"/>
+              </a:defRPr>
+            </a:pPr>
+            <a:r>
+              <a:t>• Innate immunity provides immediate response; adaptive immunity provides specificity</a:t>
+            </a:r>
+          </a:p>
+          <a:p>
+            <a:pPr>
+              <a:spcBef>
+                <a:spcPts val="800"/>
+              </a:spcBef>
+              <a:defRPr sz="1300">
+                <a:solidFill>
+                  <a:srgbClr val="94A3B8"/>
+                </a:solidFill>
+                <a:latin typeface="Arial"/>
+              </a:defRPr>
+            </a:pPr>
+            <a:r>
+              <a:t>• White blood cells, antibodies, and immune organs work in coordination</a:t>
+            </a:r>
+          </a:p>
+          <a:p>
+            <a:pPr>
+              <a:spcBef>
+                <a:spcPts val="800"/>
+              </a:spcBef>
+              <a:defRPr sz="1300">
+                <a:solidFill>
+                  <a:srgbClr val="94A3B8"/>
+                </a:solidFill>
+                <a:latin typeface="Arial"/>
+              </a:defRPr>
+            </a:pPr>
+            <a:r>
+              <a:t>• Understanding immune function helps optimize health and disease prevention</a:t>
             </a:r>
           </a:p>
         </p:txBody>
@@ -4235,7 +3932,7 @@
         <p:spPr>
           <a:xfrm>
             <a:off x="685800" y="1645920"/>
-            <a:ext cx="5486400" cy="4114800"/>
+            <a:ext cx="5029200" cy="4114800"/>
           </a:xfrm>
           <a:prstGeom prst="rect">
             <a:avLst/>
@@ -4260,7 +3957,7 @@
               </a:defRPr>
             </a:pPr>
             <a:r>
-              <a:t>• A complex network of organs, cells, and proteins that work together to protect your body</a:t>
+              <a:t>• A complex network of cells, tissues, and organs working together</a:t>
             </a:r>
           </a:p>
           <a:p>
@@ -4276,7 +3973,7 @@
               </a:defRPr>
             </a:pPr>
             <a:r>
-              <a:t>• Defends against harmful invaders: bacteria, viruses, fungi, and parasites</a:t>
+              <a:t>• Primary role: Protect the body from harmful pathogens and infections</a:t>
             </a:r>
           </a:p>
           <a:p>
@@ -4292,7 +3989,7 @@
               </a:defRPr>
             </a:pPr>
             <a:r>
-              <a:t>• Maintains internal balance and removes dead or damaged cells</a:t>
+              <a:t>• Includes bacteria, viruses, fungi, parasites, and abnormal cells</a:t>
             </a:r>
           </a:p>
           <a:p>
@@ -4308,82 +4005,35 @@
               </a:defRPr>
             </a:pPr>
             <a:r>
-              <a:t>• Functions 24/7 to keep you healthy and disease-free</a:t>
-            </a:r>
-          </a:p>
-        </p:txBody>
-      </p:sp>
-      <p:sp>
-        <p:nvSpPr>
-          <p:cNvPr id="5" name="Rounded Rectangle 4"/>
-          <p:cNvSpPr/>
+              <a:t>• Maintains homeostasis and prevents disease development</a:t>
+            </a:r>
+          </a:p>
+        </p:txBody>
+      </p:sp>
+      <p:pic>
+        <p:nvPicPr>
+          <p:cNvPr id="5" name="Picture 4" descr="slide2_immune_overview.png"/>
+          <p:cNvPicPr>
+            <a:picLocks noChangeAspect="1"/>
+          </p:cNvPicPr>
           <p:nvPr/>
-        </p:nvSpPr>
-        <p:spPr>
-          <a:xfrm>
-            <a:off x="6858000" y="1645920"/>
-            <a:ext cx="4647895" cy="4114800"/>
-          </a:xfrm>
-          <a:prstGeom prst="roundRect">
+        </p:nvPicPr>
+        <p:blipFill>
+          <a:blip r:embed="rId2"/>
+          <a:stretch>
+            <a:fillRect/>
+          </a:stretch>
+        </p:blipFill>
+        <p:spPr>
+          <a:xfrm>
+            <a:off x="6172200" y="1645920"/>
+            <a:ext cx="5333695" cy="3474720"/>
+          </a:xfrm>
+          <a:prstGeom prst="rect">
             <a:avLst/>
           </a:prstGeom>
-          <a:solidFill>
-            <a:srgbClr val="161E31"/>
-          </a:solidFill>
-          <a:ln w="19050">
-            <a:solidFill>
-              <a:srgbClr val="283757"/>
-            </a:solidFill>
-          </a:ln>
-        </p:spPr>
-        <p:style>
-          <a:lnRef idx="1">
-            <a:schemeClr val="accent1"/>
-          </a:lnRef>
-          <a:fillRef idx="3">
-            <a:schemeClr val="accent1"/>
-          </a:fillRef>
-          <a:effectRef idx="2">
-            <a:schemeClr val="accent1"/>
-          </a:effectRef>
-          <a:fontRef idx="minor">
-            <a:schemeClr val="lt1"/>
-          </a:fontRef>
-        </p:style>
-        <p:txBody>
-          <a:bodyPr rtlCol="0" anchor="ctr" wrap="square" lIns="182880" rIns="182880" tIns="182880" bIns="182880"/>
-          <a:lstStyle/>
-          <a:p>
-            <a:pPr algn="ctr">
-              <a:spcAft>
-                <a:spcPts val="1000"/>
-              </a:spcAft>
-              <a:defRPr sz="1400" b="1">
-                <a:solidFill>
-                  <a:srgbClr val="8A2BE2"/>
-                </a:solidFill>
-                <a:latin typeface="Arial"/>
-              </a:defRPr>
-            </a:pPr>
-            <a:r>
-              <a:t>Key Insight:</a:t>
-            </a:r>
-          </a:p>
-          <a:p>
-            <a:pPr>
-              <a:defRPr sz="1100">
-                <a:solidFill>
-                  <a:srgbClr val="94A3B8"/>
-                </a:solidFill>
-                <a:latin typeface="Arial"/>
-              </a:defRPr>
-            </a:pPr>
-            <a:r>
-              <a:t>This slide covers 'What is the Immune System?' in context of The Human Immune System: How Our Body Fights Diseases. Focus on discussing design boundaries and parameters during lecture.</a:t>
-            </a:r>
-          </a:p>
-        </p:txBody>
-      </p:sp>
+        </p:spPr>
+      </p:pic>
     </p:spTree>
   </p:cSld>
   <p:clrMapOvr>
@@ -4441,7 +4091,7 @@
               </a:defRPr>
             </a:pPr>
             <a:r>
-              <a:t>IMMUNE SYSTEM OVERVIEW</a:t>
+              <a:t>CORE FUNCTIONS</a:t>
             </a:r>
           </a:p>
         </p:txBody>
@@ -4477,7 +4127,7 @@
               </a:defRPr>
             </a:pPr>
             <a:r>
-              <a:t>Key Components of the Immune System</a:t>
+              <a:t>Key Functions &amp; Goals</a:t>
             </a:r>
           </a:p>
         </p:txBody>
@@ -4516,7 +4166,7 @@
               </a:defRPr>
             </a:pPr>
             <a:r>
-              <a:t>• White Blood Cells (Leukocytes): Primary defense soldiers fighting infections</a:t>
+              <a:t>• Recognition: Identify pathogens and foreign substances</a:t>
             </a:r>
           </a:p>
           <a:p>
@@ -4532,7 +4182,7 @@
               </a:defRPr>
             </a:pPr>
             <a:r>
-              <a:t>• Lymphatic System: Network of vessels and nodes filtering harmful substances</a:t>
+              <a:t>• Response: Activate defense mechanisms to neutralize threats</a:t>
             </a:r>
           </a:p>
           <a:p>
@@ -4548,7 +4198,7 @@
               </a:defRPr>
             </a:pPr>
             <a:r>
-              <a:t>• Organs: Bone marrow, thymus, spleen, lymph nodes, and tonsils</a:t>
+              <a:t>• Elimination: Remove pathogens and damaged cells</a:t>
             </a:r>
           </a:p>
           <a:p>
@@ -4564,7 +4214,7 @@
               </a:defRPr>
             </a:pPr>
             <a:r>
-              <a:t>• Proteins &amp; Chemicals: Antibodies, cytokines, and complement proteins</a:t>
+              <a:t>• Memory: Learn and remember past infections for faster future responses</a:t>
             </a:r>
           </a:p>
         </p:txBody>
@@ -4635,7 +4285,7 @@
               </a:defRPr>
             </a:pPr>
             <a:r>
-              <a:t>This slide covers 'Key Components of the Immune System' in context of The Human Immune System: How Our Body Fights Diseases. Focus on discussing design boundaries and parameters during lecture.</a:t>
+              <a:t>This slide covers 'Key Functions &amp; Goals' in context of The Human Immune System: How Our Body Fights Diseases. Focus on discussing design boundaries and parameters during lecture.</a:t>
             </a:r>
           </a:p>
         </p:txBody>
@@ -4697,7 +4347,7 @@
               </a:defRPr>
             </a:pPr>
             <a:r>
-              <a:t>IMMUNE SYSTEM ORGANS</a:t>
+              <a:t>INNATE IMMUNITY</a:t>
             </a:r>
           </a:p>
         </p:txBody>
@@ -4733,7 +4383,7 @@
               </a:defRPr>
             </a:pPr>
             <a:r>
-              <a:t>Primary Immune Organs</a:t>
+              <a:t>Innate Immunity: First Line of Defense</a:t>
             </a:r>
           </a:p>
         </p:txBody>
@@ -4747,7 +4397,7 @@
         <p:spPr>
           <a:xfrm>
             <a:off x="685800" y="1645920"/>
-            <a:ext cx="5486400" cy="4114800"/>
+            <a:ext cx="5029200" cy="4114800"/>
           </a:xfrm>
           <a:prstGeom prst="rect">
             <a:avLst/>
@@ -4772,7 +4422,7 @@
               </a:defRPr>
             </a:pPr>
             <a:r>
-              <a:t>• Bone Marrow: Produces all white blood cells and red blood cells</a:t>
+              <a:t>• Immediate, non-specific response to any pathogen</a:t>
             </a:r>
           </a:p>
           <a:p>
@@ -4788,7 +4438,7 @@
               </a:defRPr>
             </a:pPr>
             <a:r>
-              <a:t>• Thymus Gland: Develops and matures T lymphocytes in children</a:t>
+              <a:t>• Physical barriers: Skin, mucus membranes, stomach acid</a:t>
             </a:r>
           </a:p>
           <a:p>
@@ -4804,7 +4454,7 @@
               </a:defRPr>
             </a:pPr>
             <a:r>
-              <a:t>• Spleen: Filters blood, stores immune cells, and removes old cells</a:t>
+              <a:t>• Cellular response: Neutrophils and macrophages engulf pathogens</a:t>
             </a:r>
           </a:p>
           <a:p>
@@ -4820,82 +4470,35 @@
               </a:defRPr>
             </a:pPr>
             <a:r>
-              <a:t>• Lymph Nodes: Act as checkpoints throughout the body to trap pathogens</a:t>
-            </a:r>
-          </a:p>
-        </p:txBody>
-      </p:sp>
-      <p:sp>
-        <p:nvSpPr>
-          <p:cNvPr id="5" name="Rounded Rectangle 4"/>
-          <p:cNvSpPr/>
+              <a:t>• Inflammation: Increases blood flow and immune cell recruitment</a:t>
+            </a:r>
+          </a:p>
+        </p:txBody>
+      </p:sp>
+      <p:pic>
+        <p:nvPicPr>
+          <p:cNvPr id="5" name="Picture 4" descr="slide4_innate_immunity.png"/>
+          <p:cNvPicPr>
+            <a:picLocks noChangeAspect="1"/>
+          </p:cNvPicPr>
           <p:nvPr/>
-        </p:nvSpPr>
-        <p:spPr>
-          <a:xfrm>
-            <a:off x="6858000" y="1645920"/>
-            <a:ext cx="4647895" cy="4114800"/>
-          </a:xfrm>
-          <a:prstGeom prst="roundRect">
+        </p:nvPicPr>
+        <p:blipFill>
+          <a:blip r:embed="rId2"/>
+          <a:stretch>
+            <a:fillRect/>
+          </a:stretch>
+        </p:blipFill>
+        <p:spPr>
+          <a:xfrm>
+            <a:off x="6172200" y="1645920"/>
+            <a:ext cx="5333695" cy="3474720"/>
+          </a:xfrm>
+          <a:prstGeom prst="rect">
             <a:avLst/>
           </a:prstGeom>
-          <a:solidFill>
-            <a:srgbClr val="161E31"/>
-          </a:solidFill>
-          <a:ln w="19050">
-            <a:solidFill>
-              <a:srgbClr val="283757"/>
-            </a:solidFill>
-          </a:ln>
-        </p:spPr>
-        <p:style>
-          <a:lnRef idx="1">
-            <a:schemeClr val="accent1"/>
-          </a:lnRef>
-          <a:fillRef idx="3">
-            <a:schemeClr val="accent1"/>
-          </a:fillRef>
-          <a:effectRef idx="2">
-            <a:schemeClr val="accent1"/>
-          </a:effectRef>
-          <a:fontRef idx="minor">
-            <a:schemeClr val="lt1"/>
-          </a:fontRef>
-        </p:style>
-        <p:txBody>
-          <a:bodyPr rtlCol="0" anchor="ctr" wrap="square" lIns="182880" rIns="182880" tIns="182880" bIns="182880"/>
-          <a:lstStyle/>
-          <a:p>
-            <a:pPr algn="ctr">
-              <a:spcAft>
-                <a:spcPts val="1000"/>
-              </a:spcAft>
-              <a:defRPr sz="1400" b="1">
-                <a:solidFill>
-                  <a:srgbClr val="8A2BE2"/>
-                </a:solidFill>
-                <a:latin typeface="Arial"/>
-              </a:defRPr>
-            </a:pPr>
-            <a:r>
-              <a:t>Key Insight:</a:t>
-            </a:r>
-          </a:p>
-          <a:p>
-            <a:pPr>
-              <a:defRPr sz="1100">
-                <a:solidFill>
-                  <a:srgbClr val="94A3B8"/>
-                </a:solidFill>
-                <a:latin typeface="Arial"/>
-              </a:defRPr>
-            </a:pPr>
-            <a:r>
-              <a:t>This slide covers 'Primary Immune Organs' in context of The Human Immune System: How Our Body Fights Diseases. Focus on discussing design boundaries and parameters during lecture.</a:t>
-            </a:r>
-          </a:p>
-        </p:txBody>
-      </p:sp>
+        </p:spPr>
+      </p:pic>
     </p:spTree>
   </p:cSld>
   <p:clrMapOvr>
@@ -4953,7 +4556,7 @@
               </a:defRPr>
             </a:pPr>
             <a:r>
-              <a:t>IMMUNE SYSTEM ORGANS</a:t>
+              <a:t>ADAPTIVE IMMUNITY</a:t>
             </a:r>
           </a:p>
         </p:txBody>
@@ -4989,7 +4592,7 @@
               </a:defRPr>
             </a:pPr>
             <a:r>
-              <a:t>Secondary Immune Organs &amp; Structures</a:t>
+              <a:t>Adaptive Immunity: Specific Defense</a:t>
             </a:r>
           </a:p>
         </p:txBody>
@@ -5003,7 +4606,7 @@
         <p:spPr>
           <a:xfrm>
             <a:off x="685800" y="1645920"/>
-            <a:ext cx="5486400" cy="4114800"/>
+            <a:ext cx="5029200" cy="4114800"/>
           </a:xfrm>
           <a:prstGeom prst="rect">
             <a:avLst/>
@@ -5028,7 +4631,7 @@
               </a:defRPr>
             </a:pPr>
             <a:r>
-              <a:t>• Lymphatic Vessels: Transport lymph fluid containing immune cells throughout the body</a:t>
+              <a:t>• Targeted response tailored to specific pathogens</a:t>
             </a:r>
           </a:p>
           <a:p>
@@ -5044,7 +4647,7 @@
               </a:defRPr>
             </a:pPr>
             <a:r>
-              <a:t>• Tonsils &amp; Adenoids: Guard the entrance to the respiratory and digestive systems</a:t>
+              <a:t>• Takes longer to activate but highly effective</a:t>
             </a:r>
           </a:p>
           <a:p>
@@ -5060,7 +4663,7 @@
               </a:defRPr>
             </a:pPr>
             <a:r>
-              <a:t>• Peyer's Patches: Protect the small intestine from harmful microorganisms</a:t>
+              <a:t>• Creates memory cells for rapid future responses</a:t>
             </a:r>
           </a:p>
           <a:p>
@@ -5076,82 +4679,35 @@
               </a:defRPr>
             </a:pPr>
             <a:r>
-              <a:t>• Mucous Membranes: First line of defense in respiratory and digestive tracts</a:t>
-            </a:r>
-          </a:p>
-        </p:txBody>
-      </p:sp>
-      <p:sp>
-        <p:nvSpPr>
-          <p:cNvPr id="5" name="Rounded Rectangle 4"/>
-          <p:cNvSpPr/>
+              <a:t>• Forms basis for vaccination and long-term immunity</a:t>
+            </a:r>
+          </a:p>
+        </p:txBody>
+      </p:sp>
+      <p:pic>
+        <p:nvPicPr>
+          <p:cNvPr id="5" name="Picture 4" descr="slide5_adaptive_immunity.png"/>
+          <p:cNvPicPr>
+            <a:picLocks noChangeAspect="1"/>
+          </p:cNvPicPr>
           <p:nvPr/>
-        </p:nvSpPr>
-        <p:spPr>
-          <a:xfrm>
-            <a:off x="6858000" y="1645920"/>
-            <a:ext cx="4647895" cy="4114800"/>
-          </a:xfrm>
-          <a:prstGeom prst="roundRect">
+        </p:nvPicPr>
+        <p:blipFill>
+          <a:blip r:embed="rId2"/>
+          <a:stretch>
+            <a:fillRect/>
+          </a:stretch>
+        </p:blipFill>
+        <p:spPr>
+          <a:xfrm>
+            <a:off x="6172200" y="1645920"/>
+            <a:ext cx="5333695" cy="3474720"/>
+          </a:xfrm>
+          <a:prstGeom prst="rect">
             <a:avLst/>
           </a:prstGeom>
-          <a:solidFill>
-            <a:srgbClr val="161E31"/>
-          </a:solidFill>
-          <a:ln w="19050">
-            <a:solidFill>
-              <a:srgbClr val="283757"/>
-            </a:solidFill>
-          </a:ln>
-        </p:spPr>
-        <p:style>
-          <a:lnRef idx="1">
-            <a:schemeClr val="accent1"/>
-          </a:lnRef>
-          <a:fillRef idx="3">
-            <a:schemeClr val="accent1"/>
-          </a:fillRef>
-          <a:effectRef idx="2">
-            <a:schemeClr val="accent1"/>
-          </a:effectRef>
-          <a:fontRef idx="minor">
-            <a:schemeClr val="lt1"/>
-          </a:fontRef>
-        </p:style>
-        <p:txBody>
-          <a:bodyPr rtlCol="0" anchor="ctr" wrap="square" lIns="182880" rIns="182880" tIns="182880" bIns="182880"/>
-          <a:lstStyle/>
-          <a:p>
-            <a:pPr algn="ctr">
-              <a:spcAft>
-                <a:spcPts val="1000"/>
-              </a:spcAft>
-              <a:defRPr sz="1400" b="1">
-                <a:solidFill>
-                  <a:srgbClr val="8A2BE2"/>
-                </a:solidFill>
-                <a:latin typeface="Arial"/>
-              </a:defRPr>
-            </a:pPr>
-            <a:r>
-              <a:t>Key Insight:</a:t>
-            </a:r>
-          </a:p>
-          <a:p>
-            <a:pPr>
-              <a:defRPr sz="1100">
-                <a:solidFill>
-                  <a:srgbClr val="94A3B8"/>
-                </a:solidFill>
-                <a:latin typeface="Arial"/>
-              </a:defRPr>
-            </a:pPr>
-            <a:r>
-              <a:t>This slide covers 'Secondary Immune Organs &amp; Structures' in context of The Human Immune System: How Our Body Fights Diseases. Focus on discussing design boundaries and parameters during lecture.</a:t>
-            </a:r>
-          </a:p>
-        </p:txBody>
-      </p:sp>
+        </p:spPr>
+      </p:pic>
     </p:spTree>
   </p:cSld>
   <p:clrMapOvr>
@@ -5209,7 +4765,7 @@
               </a:defRPr>
             </a:pPr>
             <a:r>
-              <a:t>INNATE IMMUNITY</a:t>
+              <a:t>IMMUNE CELLS</a:t>
             </a:r>
           </a:p>
         </p:txBody>
@@ -5245,7 +4801,7 @@
               </a:defRPr>
             </a:pPr>
             <a:r>
-              <a:t>Innate Immunity: Your First Line of Defense</a:t>
+              <a:t>Immune Cells: White Blood Cell Types</a:t>
             </a:r>
           </a:p>
         </p:txBody>
@@ -5259,7 +4815,7 @@
         <p:spPr>
           <a:xfrm>
             <a:off x="685800" y="1645920"/>
-            <a:ext cx="5486400" cy="4114800"/>
+            <a:ext cx="5029200" cy="4114800"/>
           </a:xfrm>
           <a:prstGeom prst="rect">
             <a:avLst/>
@@ -5284,7 +4840,7 @@
               </a:defRPr>
             </a:pPr>
             <a:r>
-              <a:t>• Immediate response: Acts within minutes to hours of pathogen exposure</a:t>
+              <a:t>• Neutrophils: Most abundant, first responders to infection</a:t>
             </a:r>
           </a:p>
           <a:p>
@@ -5300,7 +4856,7 @@
               </a:defRPr>
             </a:pPr>
             <a:r>
-              <a:t>• Non-specific: Works against all types of invaders without prior exposure</a:t>
+              <a:t>• Macrophages: Large cells that engulf pathogens and dead cells</a:t>
             </a:r>
           </a:p>
           <a:p>
@@ -5316,7 +4872,7 @@
               </a:defRPr>
             </a:pPr>
             <a:r>
-              <a:t>• Physical Barriers: Skin, mucous, and stomach acid prevent entry</a:t>
+              <a:t>• Lymphocytes: T cells and B cells for adaptive immunity</a:t>
             </a:r>
           </a:p>
           <a:p>
@@ -5332,82 +4888,35 @@
               </a:defRPr>
             </a:pPr>
             <a:r>
-              <a:t>• Cellular Response: Macrophages and neutrophils engulf and destroy pathogens</a:t>
-            </a:r>
-          </a:p>
-        </p:txBody>
-      </p:sp>
-      <p:sp>
-        <p:nvSpPr>
-          <p:cNvPr id="5" name="Rounded Rectangle 4"/>
-          <p:cNvSpPr/>
+              <a:t>• Dendritic cells: Present antigens to activate immune response</a:t>
+            </a:r>
+          </a:p>
+        </p:txBody>
+      </p:sp>
+      <p:pic>
+        <p:nvPicPr>
+          <p:cNvPr id="5" name="Picture 4" descr="slide6_immune_cells.png"/>
+          <p:cNvPicPr>
+            <a:picLocks noChangeAspect="1"/>
+          </p:cNvPicPr>
           <p:nvPr/>
-        </p:nvSpPr>
-        <p:spPr>
-          <a:xfrm>
-            <a:off x="6858000" y="1645920"/>
-            <a:ext cx="4647895" cy="4114800"/>
-          </a:xfrm>
-          <a:prstGeom prst="roundRect">
+        </p:nvPicPr>
+        <p:blipFill>
+          <a:blip r:embed="rId2"/>
+          <a:stretch>
+            <a:fillRect/>
+          </a:stretch>
+        </p:blipFill>
+        <p:spPr>
+          <a:xfrm>
+            <a:off x="6172200" y="1645920"/>
+            <a:ext cx="5333695" cy="3474720"/>
+          </a:xfrm>
+          <a:prstGeom prst="rect">
             <a:avLst/>
           </a:prstGeom>
-          <a:solidFill>
-            <a:srgbClr val="161E31"/>
-          </a:solidFill>
-          <a:ln w="19050">
-            <a:solidFill>
-              <a:srgbClr val="283757"/>
-            </a:solidFill>
-          </a:ln>
-        </p:spPr>
-        <p:style>
-          <a:lnRef idx="1">
-            <a:schemeClr val="accent1"/>
-          </a:lnRef>
-          <a:fillRef idx="3">
-            <a:schemeClr val="accent1"/>
-          </a:fillRef>
-          <a:effectRef idx="2">
-            <a:schemeClr val="accent1"/>
-          </a:effectRef>
-          <a:fontRef idx="minor">
-            <a:schemeClr val="lt1"/>
-          </a:fontRef>
-        </p:style>
-        <p:txBody>
-          <a:bodyPr rtlCol="0" anchor="ctr" wrap="square" lIns="182880" rIns="182880" tIns="182880" bIns="182880"/>
-          <a:lstStyle/>
-          <a:p>
-            <a:pPr algn="ctr">
-              <a:spcAft>
-                <a:spcPts val="1000"/>
-              </a:spcAft>
-              <a:defRPr sz="1400" b="1">
-                <a:solidFill>
-                  <a:srgbClr val="8A2BE2"/>
-                </a:solidFill>
-                <a:latin typeface="Arial"/>
-              </a:defRPr>
-            </a:pPr>
-            <a:r>
-              <a:t>Key Insight:</a:t>
-            </a:r>
-          </a:p>
-          <a:p>
-            <a:pPr>
-              <a:defRPr sz="1100">
-                <a:solidFill>
-                  <a:srgbClr val="94A3B8"/>
-                </a:solidFill>
-                <a:latin typeface="Arial"/>
-              </a:defRPr>
-            </a:pPr>
-            <a:r>
-              <a:t>This slide covers 'Innate Immunity: Your First Line of Defense' in context of The Human Immune System: How Our Body Fights Diseases. Focus on discussing design boundaries and parameters during lecture.</a:t>
-            </a:r>
-          </a:p>
-        </p:txBody>
-      </p:sp>
+        </p:spPr>
+      </p:pic>
     </p:spTree>
   </p:cSld>
   <p:clrMapOvr>
@@ -5465,7 +4974,7 @@
               </a:defRPr>
             </a:pPr>
             <a:r>
-              <a:t>ADAPTIVE IMMUNITY</a:t>
+              <a:t>HUMORAL IMMUNITY</a:t>
             </a:r>
           </a:p>
         </p:txBody>
@@ -5501,7 +5010,7 @@
               </a:defRPr>
             </a:pPr>
             <a:r>
-              <a:t>Adaptive Immunity: Specialized Defense System</a:t>
+              <a:t>B Cells &amp; Antibodies</a:t>
             </a:r>
           </a:p>
         </p:txBody>
@@ -5515,7 +5024,7 @@
         <p:spPr>
           <a:xfrm>
             <a:off x="685800" y="1645920"/>
-            <a:ext cx="5486400" cy="4114800"/>
+            <a:ext cx="5029200" cy="4114800"/>
           </a:xfrm>
           <a:prstGeom prst="rect">
             <a:avLst/>
@@ -5540,7 +5049,7 @@
               </a:defRPr>
             </a:pPr>
             <a:r>
-              <a:t>• Targeted Response: Develops specific defenses against particular pathogens</a:t>
+              <a:t>• B cells produce antibodies (immunoglobulins) against specific antigens</a:t>
             </a:r>
           </a:p>
           <a:p>
@@ -5556,7 +5065,7 @@
               </a:defRPr>
             </a:pPr>
             <a:r>
-              <a:t>• Memory Function: Remembers past infections for faster future responses</a:t>
+              <a:t>• Antibodies neutralize pathogens and mark them for destruction</a:t>
             </a:r>
           </a:p>
           <a:p>
@@ -5572,7 +5081,7 @@
               </a:defRPr>
             </a:pPr>
             <a:r>
-              <a:t>• Slower Activation: Takes days to develop but extremely effective</a:t>
+              <a:t>• Plasma cells: Antibody factories during active infection</a:t>
             </a:r>
           </a:p>
           <a:p>
@@ -5588,82 +5097,35 @@
               </a:defRPr>
             </a:pPr>
             <a:r>
-              <a:t>• Two Main Types: Humoral (antibodies) and Cell-mediated (T cells) immunity</a:t>
-            </a:r>
-          </a:p>
-        </p:txBody>
-      </p:sp>
-      <p:sp>
-        <p:nvSpPr>
-          <p:cNvPr id="5" name="Rounded Rectangle 4"/>
-          <p:cNvSpPr/>
+              <a:t>• Memory B cells: Provide long-lasting immunity</a:t>
+            </a:r>
+          </a:p>
+        </p:txBody>
+      </p:sp>
+      <p:pic>
+        <p:nvPicPr>
+          <p:cNvPr id="5" name="Picture 4" descr="slide7_b_cells.png"/>
+          <p:cNvPicPr>
+            <a:picLocks noChangeAspect="1"/>
+          </p:cNvPicPr>
           <p:nvPr/>
-        </p:nvSpPr>
-        <p:spPr>
-          <a:xfrm>
-            <a:off x="6858000" y="1645920"/>
-            <a:ext cx="4647895" cy="4114800"/>
-          </a:xfrm>
-          <a:prstGeom prst="roundRect">
+        </p:nvPicPr>
+        <p:blipFill>
+          <a:blip r:embed="rId2"/>
+          <a:stretch>
+            <a:fillRect/>
+          </a:stretch>
+        </p:blipFill>
+        <p:spPr>
+          <a:xfrm>
+            <a:off x="6172200" y="1645920"/>
+            <a:ext cx="5333695" cy="3474720"/>
+          </a:xfrm>
+          <a:prstGeom prst="rect">
             <a:avLst/>
           </a:prstGeom>
-          <a:solidFill>
-            <a:srgbClr val="161E31"/>
-          </a:solidFill>
-          <a:ln w="19050">
-            <a:solidFill>
-              <a:srgbClr val="283757"/>
-            </a:solidFill>
-          </a:ln>
-        </p:spPr>
-        <p:style>
-          <a:lnRef idx="1">
-            <a:schemeClr val="accent1"/>
-          </a:lnRef>
-          <a:fillRef idx="3">
-            <a:schemeClr val="accent1"/>
-          </a:fillRef>
-          <a:effectRef idx="2">
-            <a:schemeClr val="accent1"/>
-          </a:effectRef>
-          <a:fontRef idx="minor">
-            <a:schemeClr val="lt1"/>
-          </a:fontRef>
-        </p:style>
-        <p:txBody>
-          <a:bodyPr rtlCol="0" anchor="ctr" wrap="square" lIns="182880" rIns="182880" tIns="182880" bIns="182880"/>
-          <a:lstStyle/>
-          <a:p>
-            <a:pPr algn="ctr">
-              <a:spcAft>
-                <a:spcPts val="1000"/>
-              </a:spcAft>
-              <a:defRPr sz="1400" b="1">
-                <a:solidFill>
-                  <a:srgbClr val="8A2BE2"/>
-                </a:solidFill>
-                <a:latin typeface="Arial"/>
-              </a:defRPr>
-            </a:pPr>
-            <a:r>
-              <a:t>Key Insight:</a:t>
-            </a:r>
-          </a:p>
-          <a:p>
-            <a:pPr>
-              <a:defRPr sz="1100">
-                <a:solidFill>
-                  <a:srgbClr val="94A3B8"/>
-                </a:solidFill>
-                <a:latin typeface="Arial"/>
-              </a:defRPr>
-            </a:pPr>
-            <a:r>
-              <a:t>This slide covers 'Adaptive Immunity: Specialized Defense System' in context of The Human Immune System: How Our Body Fights Diseases. Focus on discussing design boundaries and parameters during lecture.</a:t>
-            </a:r>
-          </a:p>
-        </p:txBody>
-      </p:sp>
+        </p:spPr>
+      </p:pic>
     </p:spTree>
   </p:cSld>
   <p:clrMapOvr>
@@ -5721,7 +5183,7 @@
               </a:defRPr>
             </a:pPr>
             <a:r>
-              <a:t>LYMPHOCYTES</a:t>
+              <a:t>CELL-MEDIATED IMMUNITY</a:t>
             </a:r>
           </a:p>
         </p:txBody>
@@ -5757,7 +5219,7 @@
               </a:defRPr>
             </a:pPr>
             <a:r>
-              <a:t>T Cells: Cellular Immunity Specialists</a:t>
+              <a:t>T Cells: Direct Cellular Defense</a:t>
             </a:r>
           </a:p>
         </p:txBody>
@@ -5771,7 +5233,7 @@
         <p:spPr>
           <a:xfrm>
             <a:off x="685800" y="1645920"/>
-            <a:ext cx="5486400" cy="4114800"/>
+            <a:ext cx="5029200" cy="4114800"/>
           </a:xfrm>
           <a:prstGeom prst="rect">
             <a:avLst/>
@@ -5796,7 +5258,7 @@
               </a:defRPr>
             </a:pPr>
             <a:r>
-              <a:t>• Helper T Cells: Coordinate immune response and activate other immune cells</a:t>
+              <a:t>• Cytotoxic T cells: Kill virus-infected and cancerous cells</a:t>
             </a:r>
           </a:p>
           <a:p>
@@ -5812,7 +5274,7 @@
               </a:defRPr>
             </a:pPr>
             <a:r>
-              <a:t>• Cytotoxic T Cells: Directly kill infected or cancerous cells</a:t>
+              <a:t>• Helper T cells: Coordinate immune response and activate other cells</a:t>
             </a:r>
           </a:p>
           <a:p>
@@ -5828,7 +5290,7 @@
               </a:defRPr>
             </a:pPr>
             <a:r>
-              <a:t>• Regulatory T Cells: Prevent overreaction and maintain immune balance</a:t>
+              <a:t>• Regulatory T cells: Control immune response to prevent autoimmunity</a:t>
             </a:r>
           </a:p>
           <a:p>
@@ -5844,82 +5306,35 @@
               </a:defRPr>
             </a:pPr>
             <a:r>
-              <a:t>• Key Role: Destroy pathogens that hide inside body cells</a:t>
-            </a:r>
-          </a:p>
-        </p:txBody>
-      </p:sp>
-      <p:sp>
-        <p:nvSpPr>
-          <p:cNvPr id="5" name="Rounded Rectangle 4"/>
-          <p:cNvSpPr/>
+              <a:t>• Direct attack mechanism using cytotoxic granules</a:t>
+            </a:r>
+          </a:p>
+        </p:txBody>
+      </p:sp>
+      <p:pic>
+        <p:nvPicPr>
+          <p:cNvPr id="5" name="Picture 4" descr="slide8_t_cells.png"/>
+          <p:cNvPicPr>
+            <a:picLocks noChangeAspect="1"/>
+          </p:cNvPicPr>
           <p:nvPr/>
-        </p:nvSpPr>
-        <p:spPr>
-          <a:xfrm>
-            <a:off x="6858000" y="1645920"/>
-            <a:ext cx="4647895" cy="4114800"/>
-          </a:xfrm>
-          <a:prstGeom prst="roundRect">
+        </p:nvPicPr>
+        <p:blipFill>
+          <a:blip r:embed="rId2"/>
+          <a:stretch>
+            <a:fillRect/>
+          </a:stretch>
+        </p:blipFill>
+        <p:spPr>
+          <a:xfrm>
+            <a:off x="6172200" y="1645920"/>
+            <a:ext cx="5333695" cy="3474720"/>
+          </a:xfrm>
+          <a:prstGeom prst="rect">
             <a:avLst/>
           </a:prstGeom>
-          <a:solidFill>
-            <a:srgbClr val="161E31"/>
-          </a:solidFill>
-          <a:ln w="19050">
-            <a:solidFill>
-              <a:srgbClr val="283757"/>
-            </a:solidFill>
-          </a:ln>
-        </p:spPr>
-        <p:style>
-          <a:lnRef idx="1">
-            <a:schemeClr val="accent1"/>
-          </a:lnRef>
-          <a:fillRef idx="3">
-            <a:schemeClr val="accent1"/>
-          </a:fillRef>
-          <a:effectRef idx="2">
-            <a:schemeClr val="accent1"/>
-          </a:effectRef>
-          <a:fontRef idx="minor">
-            <a:schemeClr val="lt1"/>
-          </a:fontRef>
-        </p:style>
-        <p:txBody>
-          <a:bodyPr rtlCol="0" anchor="ctr" wrap="square" lIns="182880" rIns="182880" tIns="182880" bIns="182880"/>
-          <a:lstStyle/>
-          <a:p>
-            <a:pPr algn="ctr">
-              <a:spcAft>
-                <a:spcPts val="1000"/>
-              </a:spcAft>
-              <a:defRPr sz="1400" b="1">
-                <a:solidFill>
-                  <a:srgbClr val="8A2BE2"/>
-                </a:solidFill>
-                <a:latin typeface="Arial"/>
-              </a:defRPr>
-            </a:pPr>
-            <a:r>
-              <a:t>Key Insight:</a:t>
-            </a:r>
-          </a:p>
-          <a:p>
-            <a:pPr>
-              <a:defRPr sz="1100">
-                <a:solidFill>
-                  <a:srgbClr val="94A3B8"/>
-                </a:solidFill>
-                <a:latin typeface="Arial"/>
-              </a:defRPr>
-            </a:pPr>
-            <a:r>
-              <a:t>This slide covers 'T Cells: Cellular Immunity Specialists' in context of The Human Immune System: How Our Body Fights Diseases. Focus on discussing design boundaries and parameters during lecture.</a:t>
-            </a:r>
-          </a:p>
-        </p:txBody>
-      </p:sp>
+        </p:spPr>
+      </p:pic>
     </p:spTree>
   </p:cSld>
   <p:clrMapOvr>
@@ -5977,7 +5392,7 @@
               </a:defRPr>
             </a:pPr>
             <a:r>
-              <a:t>LYMPHOCYTES</a:t>
+              <a:t>LYMPHOID ORGANS</a:t>
             </a:r>
           </a:p>
         </p:txBody>
@@ -6013,7 +5428,7 @@
               </a:defRPr>
             </a:pPr>
             <a:r>
-              <a:t>B Cells: Antibody Production Specialists</a:t>
+              <a:t>Immune System Organs &amp; Tissues</a:t>
             </a:r>
           </a:p>
         </p:txBody>
@@ -6027,7 +5442,7 @@
         <p:spPr>
           <a:xfrm>
             <a:off x="685800" y="1645920"/>
-            <a:ext cx="5486400" cy="4114800"/>
+            <a:ext cx="5029200" cy="4114800"/>
           </a:xfrm>
           <a:prstGeom prst="rect">
             <a:avLst/>
@@ -6052,7 +5467,7 @@
               </a:defRPr>
             </a:pPr>
             <a:r>
-              <a:t>• Antibody Secretion: Produce specific proteins that neutralize pathogens</a:t>
+              <a:t>• Bone marrow: Produces all white blood cells</a:t>
             </a:r>
           </a:p>
           <a:p>
@@ -6068,7 +5483,7 @@
               </a:defRPr>
             </a:pPr>
             <a:r>
-              <a:t>• Memory B Cells: Remember past infections and respond faster on re-exposure</a:t>
+              <a:t>• Thymus: T cell development and maturation</a:t>
             </a:r>
           </a:p>
           <a:p>
@@ -6084,7 +5499,7 @@
               </a:defRPr>
             </a:pPr>
             <a:r>
-              <a:t>• Plasma Cells: Factory cells that mass-produce antibodies during infection</a:t>
+              <a:t>• Lymph nodes: Filter lymph and activate immune response</a:t>
             </a:r>
           </a:p>
           <a:p>
@@ -6100,82 +5515,35 @@
               </a:defRPr>
             </a:pPr>
             <a:r>
-              <a:t>• Key Role: Humoral immunity - defending body fluids and bloodstream</a:t>
-            </a:r>
-          </a:p>
-        </p:txBody>
-      </p:sp>
-      <p:sp>
-        <p:nvSpPr>
-          <p:cNvPr id="5" name="Rounded Rectangle 4"/>
-          <p:cNvSpPr/>
+              <a:t>• Spleen: Filters blood and stores immune cells</a:t>
+            </a:r>
+          </a:p>
+        </p:txBody>
+      </p:sp>
+      <p:pic>
+        <p:nvPicPr>
+          <p:cNvPr id="5" name="Picture 4" descr="slide9_immune_organs.png"/>
+          <p:cNvPicPr>
+            <a:picLocks noChangeAspect="1"/>
+          </p:cNvPicPr>
           <p:nvPr/>
-        </p:nvSpPr>
-        <p:spPr>
-          <a:xfrm>
-            <a:off x="6858000" y="1645920"/>
-            <a:ext cx="4647895" cy="4114800"/>
-          </a:xfrm>
-          <a:prstGeom prst="roundRect">
+        </p:nvPicPr>
+        <p:blipFill>
+          <a:blip r:embed="rId2"/>
+          <a:stretch>
+            <a:fillRect/>
+          </a:stretch>
+        </p:blipFill>
+        <p:spPr>
+          <a:xfrm>
+            <a:off x="6172200" y="1645920"/>
+            <a:ext cx="5333695" cy="3474720"/>
+          </a:xfrm>
+          <a:prstGeom prst="rect">
             <a:avLst/>
           </a:prstGeom>
-          <a:solidFill>
-            <a:srgbClr val="161E31"/>
-          </a:solidFill>
-          <a:ln w="19050">
-            <a:solidFill>
-              <a:srgbClr val="283757"/>
-            </a:solidFill>
-          </a:ln>
-        </p:spPr>
-        <p:style>
-          <a:lnRef idx="1">
-            <a:schemeClr val="accent1"/>
-          </a:lnRef>
-          <a:fillRef idx="3">
-            <a:schemeClr val="accent1"/>
-          </a:fillRef>
-          <a:effectRef idx="2">
-            <a:schemeClr val="accent1"/>
-          </a:effectRef>
-          <a:fontRef idx="minor">
-            <a:schemeClr val="lt1"/>
-          </a:fontRef>
-        </p:style>
-        <p:txBody>
-          <a:bodyPr rtlCol="0" anchor="ctr" wrap="square" lIns="182880" rIns="182880" tIns="182880" bIns="182880"/>
-          <a:lstStyle/>
-          <a:p>
-            <a:pPr algn="ctr">
-              <a:spcAft>
-                <a:spcPts val="1000"/>
-              </a:spcAft>
-              <a:defRPr sz="1400" b="1">
-                <a:solidFill>
-                  <a:srgbClr val="8A2BE2"/>
-                </a:solidFill>
-                <a:latin typeface="Arial"/>
-              </a:defRPr>
-            </a:pPr>
-            <a:r>
-              <a:t>Key Insight:</a:t>
-            </a:r>
-          </a:p>
-          <a:p>
-            <a:pPr>
-              <a:defRPr sz="1100">
-                <a:solidFill>
-                  <a:srgbClr val="94A3B8"/>
-                </a:solidFill>
-                <a:latin typeface="Arial"/>
-              </a:defRPr>
-            </a:pPr>
-            <a:r>
-              <a:t>This slide covers 'B Cells: Antibody Production Specialists' in context of The Human Immune System: How Our Body Fights Diseases. Focus on discussing design boundaries and parameters during lecture.</a:t>
-            </a:r>
-          </a:p>
-        </p:txBody>
-      </p:sp>
+        </p:spPr>
+      </p:pic>
     </p:spTree>
   </p:cSld>
   <p:clrMapOvr>
